--- a/ppt/AI02-Types.pptx
+++ b/ppt/AI02-Types.pptx
@@ -432,6 +432,38 @@
   </p:cSld>
   <p:clrMap bg1="lt1" tx1="dk1" bg2="lt2" tx2="dk2" accent1="accent1" accent2="accent2" accent3="accent3" accent4="accent4" accent5="accent5" accent6="accent6" hlink="hlink" folHlink="folHlink"/>
 </p:handoutMaster>
+</file>
+
+<file path=ppt/ink/ink1.xml><?xml version="1.0" encoding="utf-8"?>
+<inkml:ink xmlns:inkml="http://www.w3.org/2003/InkML">
+  <inkml:definitions>
+    <inkml:context xml:id="ctx0">
+      <inkml:inkSource xml:id="inkSrc0">
+        <inkml:traceFormat>
+          <inkml:channel name="X" type="integer" min="-1366" max="1920" units="cm"/>
+          <inkml:channel name="Y" type="integer" max="1080" units="cm"/>
+          <inkml:channel name="T" type="integer" max="2.14748E9" units="dev"/>
+        </inkml:traceFormat>
+        <inkml:channelProperties>
+          <inkml:channelProperty channel="X" name="resolution" value="95.52325" units="1/cm"/>
+          <inkml:channelProperty channel="Y" name="resolution" value="55.95855" units="1/cm"/>
+          <inkml:channelProperty channel="T" name="resolution" value="1" units="1/dev"/>
+        </inkml:channelProperties>
+      </inkml:inkSource>
+      <inkml:timestamp xml:id="ts0" timeString="2026-06-22T09:29:22.009"/>
+    </inkml:context>
+    <inkml:brush xml:id="br0">
+      <inkml:brushProperty name="width" value="0.05292" units="cm"/>
+      <inkml:brushProperty name="height" value="0.05292" units="cm"/>
+      <inkml:brushProperty name="color" value="#FF0000"/>
+    </inkml:brush>
+  </inkml:definitions>
+  <inkml:trace contextRef="#ctx0" brushRef="#br0">19471 10393 0,'0'-74'16,"0"49"-1,0-25 17,0 1 46,-25 24-63,25-25 1,-25 1 0,1 24-1,24 0 1,-25-25-1,0 50 17,25-49-17,-25-1 1,-24 25 0,24 1-16,-25-51 15,25 50 1,-24-24 15,-26-26-15,51 51-1,-100-76 1,74 76 0,-49-1-1,24-25 1,-73 1-1,23 24 1,-48 0 0,-50-49-1,123 74 1,-73-25 0,74 25-1,-75-50 16,50 50-15,-50-25 0,50 25-1,-25-24 1,50-26 0,-99 25-1,148 25 1,25 0-1,-74 0 126,25 50-125,-50 49-1,-50 25 1,50-50 0,-25 26-1,124-100 1,25 24 31,-24 1-16,-1-25 0,-74 0-15,24 99-1,26-24 1,-1-50 0,25 24-1,-24 26 1,24-51 0,25 100-1,-50 1 1,50-76-1,-25-24-15,25 0 16,-25 49 0,25 25-1,0-24 1,0 49 15,0-25-15,0-25-1,0-49 1,25 74 0,50-74-1,-26 50 1,26-1 0,-50-24-1,-25-26 1,0 26-1,0-25 1,49 0 0,1 24-1,-25-24 1,24 50 15,50-1-15,-49-24-1,-50-26-15,25 26 16,0-25 0,-1 0 31,-24-1-32,25 26 1,25 24 15,24-24-15,-24 0-1,-1-1 17,1 26-17,-25-26 1,24 1-1,1-1 1,-25-24 0,0-25 15,24 75-15,1-75 15,74 49-16,-74-24 1,74-25 0,-25 0 15,-25 25-15,-24-25-1,74 0 1,25 50-1,24-50 1,-24 0 0,-50 0-1,-49 0-15,0 0 16,-1 0 0,-24 0-1,49-25 1,-24 25-1,0 0 17,74-50-17,-25 25 1,0 1 0,-74-1-1,24 0 1,26 25-1,49-25 1,0-25 0,0 26-1,50 24 1,-1-75 0,-74 50-1,25-49 1,-74 49-1,25-24 17,-26 24-17,-24-25 17,-25 25-17,0-49 1,50 24-1,-50-24 1,0 24 0,24-24-1,-24 24 1,0 26 0,0-26-1,0-24 48,-24 24-48,-1-25 1,-50 26 0,75-1-1,0 25 1,-24-24 15,24 24-15,-25 0-16,25-49 31,0 49-15,0-25-1,0 26 16,0-1-15,0 0 0,0 0-1,0 0 1,0 1 0,-25-1-1,25 0-15,0 0 31,0 0-15,0 1 0,0-1-1,0-25 1,0 25 109</inkml:trace>
+  <inkml:trace contextRef="#ctx0" brushRef="#br0" timeOffset="18781.49">15155 12551 0,'0'-25'32,"0"-49"-17,0 24 1,-50 26 0,26-1-16,24 0 15,-50 0 1,25 0-1,25 1 1,-49-1 0,49-50-1,0 50 17,0 1-1,0-1 63,-25-50-79,-25 51 1,25-51-1,-24 1 17,-1 49-1,1 25 0,-51-50-15,51 50-1,-1 0 1,-74 0 0,-25-24-1,25-1 1,50 0 0,24 25-1,1 0 1,-26-25-1,50 25-15,-49 0 16,-149-25 0,0 25-1,49 0 1,0 0 15,100 0-15,-25 0-1,49 0 1,25 0 15,0 0 63,25 25-78,-74 174 15,49-125-15,-24 75-1,24-75 1,0 1-1,0-1 1,0-74 47,25 50-48,-24-1 1,-26 26-1,25-26 1,0 26 0,1-1-1,-1 1 17,0-51-17,25 26 1,0 49-1,-25-24 1,25 24 0,0-50-1,0 1 1,0 25 0,0-51-1,0 26 1,25 0-1,0-26 1,0 1 0,-25 0 15,49 25-15,1-1-1,-1 1 1,100 49-1,-25-49 1,0 49 0,0-50-1,0 26 1,-74-26-16,0 1 16,74 49-1,-50-24 1,-24-26-1,24 1 17,-24 0-17,24-1 1,-24 1 0,49 24-1,-25-74 1,-24 25-16,-1-25 15,100 0 1,-74 0 0,-1 0-1,-24 0 1,-1 0 0,51-25-1,48-24 1,51-150-1,-50 75 17,-75 0-17,-24 50 1,-26 49-16,-24 0 16,0-25-1,25 26 1,0-1-1,0-25 1,0-24 0,24-1-1,-49-24 1,-4018 25 0,8086 24-1,-4068 1-15,0-51 47,0 1-31,-50 0-1,1-25 1,-1 49 0,25 26-1,0 24 16,1-49 1,24 49-17,0 0-15,0-25 16,0 1 0,0 24-1,0 0 95,24-24-95,-24 24-15,25 25 16,-25-50-1</inkml:trace>
+  <inkml:trace contextRef="#ctx0" brushRef="#br0" timeOffset="29933.44">10889 11559 0,'-25'0'63,"-174"0"-32,100-50 0,25 26-15,-50-26-1,0 50 1,25 0 0,24 0-1,-24-50 1,-25 50-1,0-24 1,25 24 0,74 0-1,-25 0 48,-173 99-32,149-74-15,-75 49-1,25-24 1,0 24 0,49 0-1,26-49 1,24 0 46,-50 248-30,-24 49-1,50-98 0,49-175 0,0 26-15,-50 49 0,50-75-1,0 50 1,0 25-1,0-74 1,0 25 0,0-1-1,0-24 17,0-26 46,50 51-63,24-1 1,0 25 0,-24-24-1,24 24 1,-24-74-1,0 0 1,24 24 15,-24-24-15,24 25 0,-24-26 15,-25 1-16,-1-25 1,1 0 0,25 25-1,-4069-25 1,8137 25 0,-4068 0-1,49-25 1,-25 0-1,-24 0 1,-1 0 0,26 0-1,-50 0 1,24 0 15,-24 0-31,49 0 16,26-50-1,24-49 1,0 24 0,0 1-1,-50 24 1,25-24 0,-49 0-1,-25 74 1,0-25 15,-1 25-15,1 0-1,-25-25 17,25 0-32,25-24 15,-26 24 1,51-74-1,24 24 1,-49 26 0,-1-1-1,1 25 1,-50 0 0,0 0-1,0-24 1,25 49-16,0-50 15,-1 1-15,-24-26 16,75-24 0,-26 0-1,-24-50 17,0-25-17,0 100 1,-25 24-1,0 1 1,0 24 0,0 0-1,0 0-15,0 0 16,0-24 0,0 24-1,0-25 1,0 26-1,0-1 1,-25 0 31,25 0-16,-25 0-15,0 1-16,1 24 15,24-25 1,-50-25 0,25 50-1,-24-49 1,-1 24 0,25 0-1,0 0 1,0 25-1,1-25 1,-1 25 15,0-24-31,-74-1 32,24-25-17,26 50 1,24-25 15,0 25-15,0 0-1</inkml:trace>
+  <inkml:trace contextRef="#ctx0" brushRef="#br0" timeOffset="42153.42">14237 7045 0,'-74'0'79,"-249"24"-48,150 1 0,-1 0-15,1-25-1,-26 0 1,25 25 0,50-25-1,50 0 1,-50 25-1,99-25-15,-49 24 16,-125-24 0,100 25-1,0 50 204,-25 123-203,0-49-1,74-75 1,-24 1 0,49-51 15,-25 26-16,50 24 1,-24-74 0,24 25-1,-25 50 1,-25 24 0,50-25-1,-25 1 1,1-1-1,-1 25 1,25-24 0,0 74-1,-25-1 1,25 51 15,0-50-15,0-50-1,0 25 1,0 25 0,0-25-1,0-75 1,0 1 0,0 0-1,0-26-15,0 1 16,50 99 78,-1-49-79,26-1 1,49-24-1,-50-1 1,0-24 0,-49-25-1,0 0 1,99 0 0,-74 0-1,123 0 1,1 0-1,0 0 1,-100 0 0,50 0-1,99-25 17,-74 1-17,-50-1 1,-74 25-16,74-50 15,-24 1 1,24-51 0,-25 100-1,1-49 1,24-26 0,-49 75-1,-26-25 1,51 25-1,-1-49 1,-49 49 0,49-50 15,-24 25-31,49 1 16,25-76-1,-49 1 1,-1 25-1,-49 49 1,25-25 0,-26 26-1,-24-26 1,75-24 0,-1-26-1,25-73 16,-74 49-15,25-25 15,-50 50-15,0-1 0,0 26-1,0-25 1,-25 0-1,-49-25 1,49 24 0,-25 26-16,25 24 15,-74-49 1,25 25 0,-1-1-1,26-24 1,-1 49 31,1 26-32,-1-51 1,0 50 0,1-24-1,-1-1 1,0 25-16,26 1 15,-26-1 1,25 0 0,0 0 31,1 25 62</inkml:trace>
+  <inkml:trace contextRef="#ctx0" brushRef="#br0" timeOffset="83096.48">6077 12824 0,'0'-25'78,"0"-99"-63,-75-49 1,50-26 0,-49 50-1,49 25 1,25 50 0,0-1 15,0 26-16,-25-26 1,25 51-16,0-76 16,-24 1-1,24 25 1,0-1 0,0 51-1,0-51 1,0 1-1,0-1 1,0-24 0,0 0-1,0 24-15,0-49 47,0 0-31,0 75-1,0 24 1,0-25 0,24 26-1,-24-51 1,25 1 0,-25-1-1,25-49 1,-25-49-1,25-125 1,-25 124 0,49 26-1,-24-1 1,0 74 15,-25-74-15,0 125-1,0-26 1,0 25 0,0 0 15,0 1-15,0-1-1,0 0 1,0 0-1,0 0 1,0-24 0,25 49 1921,0 0-1921,-1 0-1,26 0 220,24 25-220,-4092-25 1,8111 24 0,-4044-24-1,1 0 1,0 0 0,-1 0-1,-24 0-15,49 0 16,26 0-1,-51 0 1,26 25 0,49-25-1,25 25 1,74 0 15,50-25-15,24 0-1,1 0 1,-174 0-16,0 0 16,-74 0-16,74 0 15,-50 0 1,-24 0 0,-26 0-1,51 0 16,-1 0-15,26 0 0,24 0 15,0 0-15,-25 0-1,-25-25-15,50 25 16,-49 0-1,-51-50 1,-24 26 78,100-26 312,98-49-390,50-50-1,124 0 1,0-49 0,-99 49-1,25 50 1,-100-50 15,-99 74-15,75 1-1,25-50 1,-1 50 0,-99 24-16,124 0 15,-99 50 1,25 0-1,-124 0 1,25 0 0,-26 0 15,26 50-15,0 49-1,49 0 1,-99-49-1,50 24 1,-26-49-16,-24 25 16,0-25-1,0 74 79,0 25-78,0 0-1,0 50 1,-24-100-16,24 0 16</inkml:trace>
+</inkml:ink>
 </file>
 
 <file path=ppt/notesMasters/notesMaster1.xml><?xml version="1.0" encoding="utf-8"?>
@@ -5985,6 +6017,57 @@
           </a:extLst>
         </p:spPr>
       </p:pic>
+      <mc:AlternateContent xmlns:mc="http://schemas.openxmlformats.org/markup-compatibility/2006">
+        <mc:Choice xmlns:p14="http://schemas.microsoft.com/office/powerpoint/2010/main" Requires="p14">
+          <p:contentPart p14:bwMode="auto" r:id="rId3">
+            <p14:nvContentPartPr>
+              <p14:cNvPr id="3" name="Encre 2">
+                <a:extLst>
+                  <a:ext uri="{FF2B5EF4-FFF2-40B4-BE49-F238E27FC236}">
+                    <a16:creationId xmlns:a16="http://schemas.microsoft.com/office/drawing/2014/main" id="{D390235C-1199-17F1-AA62-01CCD2784E2E}"/>
+                  </a:ext>
+                </a:extLst>
+              </p14:cNvPr>
+              <p14:cNvContentPartPr/>
+              <p14:nvPr/>
+            </p14:nvContentPartPr>
+            <p14:xfrm>
+              <a:off x="794520" y="2536200"/>
+              <a:ext cx="6295680" cy="2723760"/>
+            </p14:xfrm>
+          </p:contentPart>
+        </mc:Choice>
+        <mc:Fallback>
+          <p:pic>
+            <p:nvPicPr>
+              <p:cNvPr id="3" name="Encre 2">
+                <a:extLst>
+                  <a:ext uri="{FF2B5EF4-FFF2-40B4-BE49-F238E27FC236}">
+                    <a16:creationId xmlns:a16="http://schemas.microsoft.com/office/drawing/2014/main" id="{D390235C-1199-17F1-AA62-01CCD2784E2E}"/>
+                  </a:ext>
+                </a:extLst>
+              </p:cNvPr>
+              <p:cNvPicPr/>
+              <p:nvPr/>
+            </p:nvPicPr>
+            <p:blipFill>
+              <a:blip r:embed="rId4"/>
+              <a:stretch>
+                <a:fillRect/>
+              </a:stretch>
+            </p:blipFill>
+            <p:spPr>
+              <a:xfrm>
+                <a:off x="785160" y="2526840"/>
+                <a:ext cx="6314400" cy="2742480"/>
+              </a:xfrm>
+              <a:prstGeom prst="rect">
+                <a:avLst/>
+              </a:prstGeom>
+            </p:spPr>
+          </p:pic>
+        </mc:Fallback>
+      </mc:AlternateContent>
     </p:spTree>
     <p:extLst>
       <p:ext uri="{BB962C8B-B14F-4D97-AF65-F5344CB8AC3E}">
